--- a/e-Commerce Data Analysis Project.pptx
+++ b/e-Commerce Data Analysis Project.pptx
@@ -709,7 +709,7 @@
   <pc:docChgLst>
     <pc:chgData name="madhurihawaldar55@gmail.com" userId="456f07d70debe93a" providerId="LiveId" clId="{BAC3DBC9-64CC-4239-A353-2B2342B73AC8}"/>
     <pc:docChg chg="undo custSel modSld modMainMaster">
-      <pc:chgData name="madhurihawaldar55@gmail.com" userId="456f07d70debe93a" providerId="LiveId" clId="{BAC3DBC9-64CC-4239-A353-2B2342B73AC8}" dt="2026-03-11T05:16:31.944" v="442"/>
+      <pc:chgData name="madhurihawaldar55@gmail.com" userId="456f07d70debe93a" providerId="LiveId" clId="{BAC3DBC9-64CC-4239-A353-2B2342B73AC8}" dt="2026-03-13T04:26:41.339" v="476" actId="20577"/>
       <pc:docMkLst>
         <pc:docMk/>
       </pc:docMkLst>
@@ -765,8 +765,8 @@
           </ac:spMkLst>
         </pc:spChg>
       </pc:sldChg>
-      <pc:sldChg chg="modSp">
-        <pc:chgData name="madhurihawaldar55@gmail.com" userId="456f07d70debe93a" providerId="LiveId" clId="{BAC3DBC9-64CC-4239-A353-2B2342B73AC8}" dt="2026-03-11T05:00:32.169" v="0"/>
+      <pc:sldChg chg="modSp mod">
+        <pc:chgData name="madhurihawaldar55@gmail.com" userId="456f07d70debe93a" providerId="LiveId" clId="{BAC3DBC9-64CC-4239-A353-2B2342B73AC8}" dt="2026-03-13T04:26:41.339" v="476" actId="20577"/>
         <pc:sldMkLst>
           <pc:docMk/>
           <pc:sldMk cId="2985766857" sldId="260"/>
@@ -777,6 +777,38 @@
             <pc:docMk/>
             <pc:sldMk cId="2985766857" sldId="260"/>
             <ac:spMk id="2" creationId="{0A30659E-E782-1A7A-8913-B0DC4931CDC1}"/>
+          </ac:spMkLst>
+        </pc:spChg>
+        <pc:spChg chg="mod">
+          <ac:chgData name="madhurihawaldar55@gmail.com" userId="456f07d70debe93a" providerId="LiveId" clId="{BAC3DBC9-64CC-4239-A353-2B2342B73AC8}" dt="2026-03-13T04:25:34.467" v="450" actId="20577"/>
+          <ac:spMkLst>
+            <pc:docMk/>
+            <pc:sldMk cId="2985766857" sldId="260"/>
+            <ac:spMk id="5" creationId="{B7D80D4C-29E0-E6F8-DAA6-07F6B035BAE0}"/>
+          </ac:spMkLst>
+        </pc:spChg>
+        <pc:spChg chg="mod">
+          <ac:chgData name="madhurihawaldar55@gmail.com" userId="456f07d70debe93a" providerId="LiveId" clId="{BAC3DBC9-64CC-4239-A353-2B2342B73AC8}" dt="2026-03-13T04:26:23.754" v="466" actId="20577"/>
+          <ac:spMkLst>
+            <pc:docMk/>
+            <pc:sldMk cId="2985766857" sldId="260"/>
+            <ac:spMk id="6" creationId="{5FF75B5E-C270-68B5-6595-7D89DE36061F}"/>
+          </ac:spMkLst>
+        </pc:spChg>
+        <pc:spChg chg="mod">
+          <ac:chgData name="madhurihawaldar55@gmail.com" userId="456f07d70debe93a" providerId="LiveId" clId="{BAC3DBC9-64CC-4239-A353-2B2342B73AC8}" dt="2026-03-13T04:25:45.876" v="458" actId="20577"/>
+          <ac:spMkLst>
+            <pc:docMk/>
+            <pc:sldMk cId="2985766857" sldId="260"/>
+            <ac:spMk id="7" creationId="{B83C1D0F-F62D-9911-933F-07B4585F5603}"/>
+          </ac:spMkLst>
+        </pc:spChg>
+        <pc:spChg chg="mod">
+          <ac:chgData name="madhurihawaldar55@gmail.com" userId="456f07d70debe93a" providerId="LiveId" clId="{BAC3DBC9-64CC-4239-A353-2B2342B73AC8}" dt="2026-03-13T04:26:41.339" v="476" actId="20577"/>
+          <ac:spMkLst>
+            <pc:docMk/>
+            <pc:sldMk cId="2985766857" sldId="260"/>
+            <ac:spMk id="8" creationId="{16BD8C12-3B96-4C85-D3E6-FD475576A61B}"/>
           </ac:spMkLst>
         </pc:spChg>
       </pc:sldChg>
@@ -1428,7 +1460,7 @@
           <a:p>
             <a:fld id="{2B01B31F-5DC3-4BD4-A0C1-A64A52C59180}" type="datetimeFigureOut">
               <a:rPr lang="en-IN" smtClean="0"/>
-              <a:t>11-03-2026</a:t>
+              <a:t>13-03-2026</a:t>
             </a:fld>
             <a:endParaRPr lang="en-IN"/>
           </a:p>
@@ -1842,7 +1874,7 @@
           <a:p>
             <a:fld id="{2B01B31F-5DC3-4BD4-A0C1-A64A52C59180}" type="datetimeFigureOut">
               <a:rPr lang="en-IN" smtClean="0"/>
-              <a:t>11-03-2026</a:t>
+              <a:t>13-03-2026</a:t>
             </a:fld>
             <a:endParaRPr lang="en-IN"/>
           </a:p>
@@ -2178,7 +2210,7 @@
           <a:p>
             <a:fld id="{2B01B31F-5DC3-4BD4-A0C1-A64A52C59180}" type="datetimeFigureOut">
               <a:rPr lang="en-IN" smtClean="0"/>
-              <a:t>11-03-2026</a:t>
+              <a:t>13-03-2026</a:t>
             </a:fld>
             <a:endParaRPr lang="en-IN"/>
           </a:p>
@@ -2583,7 +2615,7 @@
           <a:p>
             <a:fld id="{2B01B31F-5DC3-4BD4-A0C1-A64A52C59180}" type="datetimeFigureOut">
               <a:rPr lang="en-IN" smtClean="0"/>
-              <a:t>11-03-2026</a:t>
+              <a:t>13-03-2026</a:t>
             </a:fld>
             <a:endParaRPr lang="en-IN"/>
           </a:p>
@@ -3151,7 +3183,7 @@
           <a:p>
             <a:fld id="{2B01B31F-5DC3-4BD4-A0C1-A64A52C59180}" type="datetimeFigureOut">
               <a:rPr lang="en-IN" smtClean="0"/>
-              <a:t>11-03-2026</a:t>
+              <a:t>13-03-2026</a:t>
             </a:fld>
             <a:endParaRPr lang="en-IN"/>
           </a:p>
@@ -3832,7 +3864,7 @@
           <a:p>
             <a:fld id="{2B01B31F-5DC3-4BD4-A0C1-A64A52C59180}" type="datetimeFigureOut">
               <a:rPr lang="en-IN" smtClean="0"/>
-              <a:t>11-03-2026</a:t>
+              <a:t>13-03-2026</a:t>
             </a:fld>
             <a:endParaRPr lang="en-IN"/>
           </a:p>
@@ -4745,7 +4777,7 @@
           <a:p>
             <a:fld id="{2B01B31F-5DC3-4BD4-A0C1-A64A52C59180}" type="datetimeFigureOut">
               <a:rPr lang="en-IN" smtClean="0"/>
-              <a:t>11-03-2026</a:t>
+              <a:t>13-03-2026</a:t>
             </a:fld>
             <a:endParaRPr lang="en-IN"/>
           </a:p>
@@ -5058,7 +5090,7 @@
           <a:p>
             <a:fld id="{2B01B31F-5DC3-4BD4-A0C1-A64A52C59180}" type="datetimeFigureOut">
               <a:rPr lang="en-IN" smtClean="0"/>
-              <a:t>11-03-2026</a:t>
+              <a:t>13-03-2026</a:t>
             </a:fld>
             <a:endParaRPr lang="en-IN"/>
           </a:p>
@@ -5322,7 +5354,7 @@
           <a:p>
             <a:fld id="{2B01B31F-5DC3-4BD4-A0C1-A64A52C59180}" type="datetimeFigureOut">
               <a:rPr lang="en-IN" smtClean="0"/>
-              <a:t>11-03-2026</a:t>
+              <a:t>13-03-2026</a:t>
             </a:fld>
             <a:endParaRPr lang="en-IN"/>
           </a:p>
@@ -5645,7 +5677,7 @@
           <a:p>
             <a:fld id="{2B01B31F-5DC3-4BD4-A0C1-A64A52C59180}" type="datetimeFigureOut">
               <a:rPr lang="en-IN" smtClean="0"/>
-              <a:t>11-03-2026</a:t>
+              <a:t>13-03-2026</a:t>
             </a:fld>
             <a:endParaRPr lang="en-IN"/>
           </a:p>
@@ -6034,7 +6066,7 @@
           <a:p>
             <a:fld id="{2B01B31F-5DC3-4BD4-A0C1-A64A52C59180}" type="datetimeFigureOut">
               <a:rPr lang="en-IN" smtClean="0"/>
-              <a:t>11-03-2026</a:t>
+              <a:t>13-03-2026</a:t>
             </a:fld>
             <a:endParaRPr lang="en-IN"/>
           </a:p>
@@ -6410,7 +6442,7 @@
           <a:p>
             <a:fld id="{2B01B31F-5DC3-4BD4-A0C1-A64A52C59180}" type="datetimeFigureOut">
               <a:rPr lang="en-IN" smtClean="0"/>
-              <a:t>11-03-2026</a:t>
+              <a:t>13-03-2026</a:t>
             </a:fld>
             <a:endParaRPr lang="en-IN"/>
           </a:p>
@@ -6916,7 +6948,7 @@
           <a:p>
             <a:fld id="{2B01B31F-5DC3-4BD4-A0C1-A64A52C59180}" type="datetimeFigureOut">
               <a:rPr lang="en-IN" smtClean="0"/>
-              <a:t>11-03-2026</a:t>
+              <a:t>13-03-2026</a:t>
             </a:fld>
             <a:endParaRPr lang="en-IN"/>
           </a:p>
@@ -7173,7 +7205,7 @@
           <a:p>
             <a:fld id="{2B01B31F-5DC3-4BD4-A0C1-A64A52C59180}" type="datetimeFigureOut">
               <a:rPr lang="en-IN" smtClean="0"/>
-              <a:t>11-03-2026</a:t>
+              <a:t>13-03-2026</a:t>
             </a:fld>
             <a:endParaRPr lang="en-IN"/>
           </a:p>
@@ -7336,7 +7368,7 @@
           <a:p>
             <a:fld id="{2B01B31F-5DC3-4BD4-A0C1-A64A52C59180}" type="datetimeFigureOut">
               <a:rPr lang="en-IN" smtClean="0"/>
-              <a:t>11-03-2026</a:t>
+              <a:t>13-03-2026</a:t>
             </a:fld>
             <a:endParaRPr lang="en-IN"/>
           </a:p>
@@ -7726,7 +7758,7 @@
           <a:p>
             <a:fld id="{2B01B31F-5DC3-4BD4-A0C1-A64A52C59180}" type="datetimeFigureOut">
               <a:rPr lang="en-IN" smtClean="0"/>
-              <a:t>11-03-2026</a:t>
+              <a:t>13-03-2026</a:t>
             </a:fld>
             <a:endParaRPr lang="en-IN"/>
           </a:p>
@@ -8135,7 +8167,7 @@
           <a:p>
             <a:fld id="{2B01B31F-5DC3-4BD4-A0C1-A64A52C59180}" type="datetimeFigureOut">
               <a:rPr lang="en-IN" smtClean="0"/>
-              <a:t>11-03-2026</a:t>
+              <a:t>13-03-2026</a:t>
             </a:fld>
             <a:endParaRPr lang="en-IN"/>
           </a:p>
@@ -8400,7 +8432,7 @@
           <a:p>
             <a:fld id="{2B01B31F-5DC3-4BD4-A0C1-A64A52C59180}" type="datetimeFigureOut">
               <a:rPr lang="en-IN" smtClean="0"/>
-              <a:t>11-03-2026</a:t>
+              <a:t>13-03-2026</a:t>
             </a:fld>
             <a:endParaRPr lang="en-IN"/>
           </a:p>
@@ -12268,7 +12300,7 @@
                 <a:ea typeface="Calibri" panose="020F0502020204030204" pitchFamily="34" charset="0"/>
                 <a:cs typeface="Calibri" panose="020F0502020204030204" pitchFamily="34" charset="0"/>
               </a:rPr>
-              <a:t> 99441</a:t>
+              <a:t> 95128</a:t>
             </a:r>
             <a:endParaRPr lang="en-IN" sz="2000" dirty="0"/>
           </a:p>
@@ -12333,7 +12365,7 @@
                 <a:ea typeface="Calibri" panose="020F0502020204030204" pitchFamily="34" charset="0"/>
                 <a:cs typeface="Calibri" panose="020F0502020204030204" pitchFamily="34" charset="0"/>
               </a:rPr>
-              <a:t> 3095</a:t>
+              <a:t> 2914</a:t>
             </a:r>
             <a:endParaRPr lang="en-IN" sz="2000" dirty="0"/>
           </a:p>
@@ -12406,7 +12438,7 @@
                 <a:ea typeface="Calibri" panose="020F0502020204030204" pitchFamily="34" charset="0"/>
                 <a:cs typeface="Calibri" panose="020F0502020204030204" pitchFamily="34" charset="0"/>
               </a:rPr>
-              <a:t>99441</a:t>
+              <a:t>95128</a:t>
             </a:r>
           </a:p>
         </p:txBody>
@@ -12465,12 +12497,12 @@
           <a:p>
             <a:pPr algn="ctr"/>
             <a:r>
-              <a:rPr lang="en-IN" sz="2000" dirty="0">
-                <a:latin typeface="Calibri" panose="020F0502020204030204" pitchFamily="34" charset="0"/>
-                <a:ea typeface="Calibri" panose="020F0502020204030204" pitchFamily="34" charset="0"/>
-                <a:cs typeface="Calibri" panose="020F0502020204030204" pitchFamily="34" charset="0"/>
-              </a:rPr>
-              <a:t>15843553 </a:t>
+              <a:rPr lang="en-IN" sz="2000">
+                <a:latin typeface="Calibri" panose="020F0502020204030204" pitchFamily="34" charset="0"/>
+                <a:ea typeface="Calibri" panose="020F0502020204030204" pitchFamily="34" charset="0"/>
+                <a:cs typeface="Calibri" panose="020F0502020204030204" pitchFamily="34" charset="0"/>
+              </a:rPr>
+              <a:t>15898189 </a:t>
             </a:r>
             <a:endParaRPr lang="en-IN" sz="2000" dirty="0"/>
           </a:p>
